--- a/TPM_2_Validaciones.pptx
+++ b/TPM_2_Validaciones.pptx
@@ -113,6 +113,35 @@
     </p:ext>
   </p:extLst>
 </p:presentation>
+</file>
+
+<file path=ppt/changesInfos/changesInfo1.xml><?xml version="1.0" encoding="utf-8"?>
+<pc:chgInfo xmlns:a="http://schemas.openxmlformats.org/drawingml/2006/main" xmlns:r="http://schemas.openxmlformats.org/officeDocument/2006/relationships" xmlns:ac="http://schemas.microsoft.com/office/drawing/2013/main/command" xmlns:pc="http://schemas.microsoft.com/office/powerpoint/2013/main/command">
+  <pc:docChgLst>
+    <pc:chgData name="Saul Rodriguez Garduno" userId="89bbfc5b-c516-44bd-896b-a6523f35c36f" providerId="ADAL" clId="{82688A9A-497A-47A0-B559-B845EB09B0DD}"/>
+    <pc:docChg chg="modSld">
+      <pc:chgData name="Saul Rodriguez Garduno" userId="89bbfc5b-c516-44bd-896b-a6523f35c36f" providerId="ADAL" clId="{82688A9A-497A-47A0-B559-B845EB09B0DD}" dt="2026-09-19T05:44:30.980" v="1" actId="1076"/>
+      <pc:docMkLst>
+        <pc:docMk/>
+      </pc:docMkLst>
+      <pc:sldChg chg="modSp mod">
+        <pc:chgData name="Saul Rodriguez Garduno" userId="89bbfc5b-c516-44bd-896b-a6523f35c36f" providerId="ADAL" clId="{82688A9A-497A-47A0-B559-B845EB09B0DD}" dt="2026-09-19T05:44:30.980" v="1" actId="1076"/>
+        <pc:sldMkLst>
+          <pc:docMk/>
+          <pc:sldMk cId="4055971772" sldId="436"/>
+        </pc:sldMkLst>
+        <pc:spChg chg="mod">
+          <ac:chgData name="Saul Rodriguez Garduno" userId="89bbfc5b-c516-44bd-896b-a6523f35c36f" providerId="ADAL" clId="{82688A9A-497A-47A0-B559-B845EB09B0DD}" dt="2026-09-19T05:44:30.980" v="1" actId="1076"/>
+          <ac:spMkLst>
+            <pc:docMk/>
+            <pc:sldMk cId="4055971772" sldId="436"/>
+            <ac:spMk id="8" creationId="{3C2C7A66-96E5-67E7-0D50-F80DB89DD3EB}"/>
+          </ac:spMkLst>
+        </pc:spChg>
+      </pc:sldChg>
+    </pc:docChg>
+  </pc:docChgLst>
+</pc:chgInfo>
 </file>
 
 <file path=ppt/notesMasters/notesMaster1.xml><?xml version="1.0" encoding="utf-8"?>
@@ -2304,7 +2333,7 @@
               <a:defRPr/>
             </a:pPr>
             <a:r>
-              <a:rPr lang="en-US" altLang="ko-KR" sz="1800" b="1" spc="-30" dirty="0" smtClean="0">
+              <a:rPr lang="en-US" altLang="ko-KR" sz="1800" b="1" spc="-30" dirty="0">
                 <a:solidFill>
                   <a:prstClr val="black"/>
                 </a:solidFill>
@@ -2381,7 +2410,7 @@
               <a:defRPr/>
             </a:pPr>
             <a:r>
-              <a:rPr lang="en-US" altLang="ko-KR" sz="1600" dirty="0" smtClean="0">
+              <a:rPr lang="en-US" altLang="ko-KR" sz="1600" dirty="0">
                 <a:solidFill>
                   <a:schemeClr val="tx1"/>
                 </a:solidFill>
@@ -2808,7 +2837,7 @@
               <a:defRPr/>
             </a:pPr>
             <a:r>
-              <a:rPr kumimoji="1" lang="es-419" altLang="ko-KR" sz="1300" b="1" i="0" u="none" strike="noStrike" kern="1200" cap="none" spc="-50" normalizeH="0" baseline="0" noProof="0" dirty="0" smtClean="0">
+              <a:rPr kumimoji="1" lang="es-419" altLang="ko-KR" sz="1300" b="1" i="0" u="none" strike="noStrike" kern="1200" cap="none" spc="-50" normalizeH="0" baseline="0" noProof="0" dirty="0">
                 <a:ln>
                   <a:noFill/>
                 </a:ln>
@@ -3157,10 +3186,9 @@
               <a:t> </a:t>
             </a:r>
             <a:r>
-              <a:rPr lang="es-419" altLang="ko-KR" sz="1400" b="1" dirty="0" smtClean="0"/>
+              <a:rPr lang="es-419" altLang="ko-KR" sz="1400" b="1" dirty="0"/>
               <a:t>EFFECT:</a:t>
             </a:r>
-            <a:endParaRPr lang="es-419" altLang="ko-KR" sz="1400" b="1" dirty="0"/>
           </a:p>
           <a:p>
             <a:pPr marL="171450" indent="-171450">
@@ -4053,7 +4081,7 @@
         </p:nvGraphicFramePr>
         <p:xfrm>
           <a:off x="8807451" y="560208"/>
-          <a:ext cx="1012827" cy="950688"/>
+          <a:ext cx="1012827" cy="874488"/>
         </p:xfrm>
         <a:graphic>
           <a:graphicData uri="http://schemas.openxmlformats.org/drawingml/2006/table">
@@ -7467,7 +7495,7 @@
               <a:t> </a:t>
             </a:r>
             <a:r>
-              <a:rPr kumimoji="1" lang="es-419" altLang="ko-KR" sz="1300" b="1" i="0" u="none" strike="noStrike" kern="1200" cap="none" spc="0" normalizeH="0" baseline="0" noProof="0" dirty="0" smtClean="0">
+              <a:rPr kumimoji="1" lang="es-419" altLang="ko-KR" sz="1300" b="1" i="0" u="none" strike="noStrike" kern="1200" cap="none" spc="0" normalizeH="0" baseline="0" noProof="0" dirty="0">
                 <a:ln>
                   <a:noFill/>
                 </a:ln>
@@ -7947,30 +7975,6 @@
               </a:rPr>
               <a:t>The 1211 "Cover is tilted" alarm is raised from a single camera reading, so capture noise is read as a real tilted cover.</a:t>
             </a:r>
-            <a:r>
-              <a:rPr lang="en-US" altLang="ko-KR" sz="1100" dirty="0" err="1">
-                <a:solidFill>
-                  <a:prstClr val="black"/>
-                </a:solidFill>
-                <a:latin typeface="LG스마트체 Regular" panose="020B0600000101010101" pitchFamily="50" charset="-127"/>
-                <a:ea typeface="LG스마트체 Regular" panose="020B0600000101010101" pitchFamily="50" charset="-127"/>
-                <a:cs typeface="Arial" panose="020B0604020202020204" pitchFamily="34" charset="0"/>
-                <a:sym typeface="Wingdings" pitchFamily="2" charset="2"/>
-              </a:rPr>
-              <a:t/>
-            </a:r>
-            <a:r>
-              <a:rPr lang="en-US" altLang="ko-KR" sz="1100" dirty="0">
-                <a:solidFill>
-                  <a:prstClr val="black"/>
-                </a:solidFill>
-                <a:latin typeface="LG스마트체 Regular" panose="020B0600000101010101" pitchFamily="50" charset="-127"/>
-                <a:ea typeface="LG스마트체 Regular" panose="020B0600000101010101" pitchFamily="50" charset="-127"/>
-                <a:cs typeface="Arial" panose="020B0604020202020204" pitchFamily="34" charset="0"/>
-                <a:sym typeface="Wingdings" pitchFamily="2" charset="2"/>
-              </a:rPr>
-              <a:t/>
-            </a:r>
           </a:p>
         </p:txBody>
       </p:sp>
@@ -7988,7 +7992,7 @@
         </p:nvSpPr>
         <p:spPr>
           <a:xfrm>
-            <a:off x="4250616" y="576400"/>
+            <a:off x="4172978" y="593653"/>
             <a:ext cx="4498076" cy="153888"/>
           </a:xfrm>
           <a:prstGeom prst="rect">
@@ -8028,14 +8032,14 @@
               <a:t>18</a:t>
             </a:r>
             <a:r>
-              <a:rPr lang="en-US" altLang="ko-KR" sz="1000" b="1" spc="-29" dirty="0" smtClean="0">
+              <a:rPr lang="en-US" altLang="ko-KR" sz="1000" b="1" spc="-29" dirty="0">
                 <a:latin typeface="Arial Narrow" panose="020B0606020202030204" pitchFamily="34" charset="0"/>
                 <a:ea typeface="LG스마트체 Regular" panose="020B0600000101010101" pitchFamily="50" charset="-127"/>
               </a:rPr>
               <a:t>/09/2026</a:t>
             </a:r>
             <a:r>
-              <a:rPr lang="ko-KR" altLang="en-US" sz="1000" b="1" spc="-29" dirty="0" smtClean="0">
+              <a:rPr lang="ko-KR" altLang="en-US" sz="1000" b="1" spc="-29" dirty="0">
                 <a:latin typeface="Arial Narrow" panose="020B0606020202030204" pitchFamily="34" charset="0"/>
                 <a:ea typeface="LG스마트체 Regular" panose="020B0600000101010101" pitchFamily="50" charset="-127"/>
               </a:rPr>
@@ -8270,10 +8274,10 @@
           </a:lstStyle>
           <a:p>
             <a:r>
-              <a:rPr lang="es-MX" altLang="ko-KR" sz="1400" b="1" dirty="0" smtClean="0"/>
+              <a:rPr lang="es-MX" altLang="ko-KR" sz="1400" b="1" dirty="0"/>
               <a:t>IMPACT:</a:t>
             </a:r>
-            <a:endParaRPr lang="es-419" altLang="ko-KR" sz="1400" b="1" dirty="0" smtClean="0"/>
+            <a:endParaRPr lang="es-419" altLang="ko-KR" sz="1400" b="1" dirty="0"/>
           </a:p>
           <a:p>
             <a:pPr marL="171450" indent="-171450">
@@ -8290,10 +8294,6 @@
             <a:r>
               <a:rPr lang="en-US" altLang="ko-KR" dirty="0"/>
               <a:t>No more pallets reaching the Unloader with an unregistered piece.</a:t>
-            </a:r>
-            <a:r>
-              <a:rPr lang="en-US" altLang="ko-KR" dirty="0" smtClean="0"/>
-              <a:t/>
             </a:r>
           </a:p>
           <a:p>
@@ -8314,23 +8314,7 @@
             </a:r>
             <a:r>
               <a:rPr lang="es-MX" altLang="ko-KR" dirty="0"/>
-              <a:t> </a:t>
-            </a:r>
-            <a:r>
-              <a:rPr lang="es-MX" altLang="ko-KR" dirty="0" err="1"/>
-              <a:t/>
-            </a:r>
-            <a:r>
-              <a:rPr lang="es-MX" altLang="ko-KR" dirty="0"/>
-              <a:t> </a:t>
-            </a:r>
-            <a:r>
-              <a:rPr lang="es-MX" altLang="ko-KR" dirty="0" err="1"/>
-              <a:t/>
-            </a:r>
-            <a:r>
-              <a:rPr lang="es-MX" altLang="ko-KR" dirty="0" smtClean="0"/>
-              <a:t/>
+              <a:t>  </a:t>
             </a:r>
           </a:p>
           <a:p>
@@ -9016,4 +9000,10 @@
     </a:ext>
   </a:extLst>
 </a:theme>
+</file>
+
+<file path=docMetadata/LabelInfo.xml><?xml version="1.0" encoding="utf-8"?>
+<clbl:labelList xmlns:clbl="http://schemas.microsoft.com/office/2020/mipLabelMetadata">
+  <clbl:label id="{99b8a968-831d-4cfc-b1f9-4367a1331151}" enabled="1" method="Privileged" siteId="{e6c7989d-a5fe-4b7b-a335-3288406db2fd}" removed="0"/>
+</clbl:labelList>
 </file>